--- a/docs/presentation/exports/Farovon_instruktsiya_zapolnenie.pptx
+++ b/docs/presentation/exports/Farovon_instruktsiya_zapolnenie.pptx
@@ -1214,7 +1214,7 @@
                 <a:ea typeface="Calibri" pitchFamily="34" charset="-122"/>
                 <a:cs typeface="Calibri" pitchFamily="34" charset="-120"/>
               </a:rPr>
-              <a:t>Рынок труда и вознаграждений в одной системе</a:t>
+              <a:t>Обучение: как вносить данные по рынку</a:t>
             </a:r>
             <a:endParaRPr lang="en-US" sz="5000" dirty="0"/>
           </a:p>
@@ -1253,7 +1253,7 @@
                 <a:ea typeface="Calibri" pitchFamily="34" charset="-122"/>
                 <a:cs typeface="Calibri" pitchFamily="34" charset="-120"/>
               </a:rPr>
-              <a:t>Два коротких шага — какие компании сравнивать и что вносить по каждой должности</a:t>
+              <a:t>Урок из двух шагов: выбираем компании и вносим оклад, премию, льготы</a:t>
             </a:r>
             <a:endParaRPr lang="en-US" sz="2000" dirty="0"/>
           </a:p>
@@ -1292,7 +1292,7 @@
                 <a:ea typeface="Calibri" pitchFamily="34" charset="-122"/>
                 <a:cs typeface="Calibri" pitchFamily="34" charset="-120"/>
               </a:rPr>
-              <a:t>Инструкция по заполнению данных о рынке</a:t>
+              <a:t>Обучение для ответственных за сбор данных</a:t>
             </a:r>
             <a:endParaRPr lang="en-US" sz="1400" dirty="0"/>
           </a:p>
@@ -1363,7 +1363,7 @@
                 <a:ea typeface="Calibri" pitchFamily="34" charset="-122"/>
                 <a:cs typeface="Calibri" pitchFamily="34" charset="-120"/>
               </a:rPr>
-              <a:t>Шаг 1. Данные собирают те, кто знает рынок</a:t>
+              <a:t>Урок 1. Выбираем компании для сравнения</a:t>
             </a:r>
             <a:endParaRPr lang="en-US" sz="3200" dirty="0"/>
           </a:p>
@@ -1543,7 +1543,7 @@
                 <a:ea typeface="Calibri" pitchFamily="34" charset="-122"/>
                 <a:cs typeface="Calibri" pitchFamily="34" charset="-120"/>
               </a:rPr>
-              <a:t>Демонстрационные данные</a:t>
+              <a:t>Реальный интерфейс · тестовые данные</a:t>
             </a:r>
             <a:endParaRPr lang="en-US" sz="1100" dirty="0"/>
           </a:p>
@@ -1614,7 +1614,7 @@
                 <a:ea typeface="Calibri" pitchFamily="34" charset="-122"/>
                 <a:cs typeface="Calibri" pitchFamily="34" charset="-120"/>
               </a:rPr>
-              <a:t>Шаг 2. По каждой должности: оклад, премия, льготы</a:t>
+              <a:t>Урок 2. Вносим оклад, премию и льготы</a:t>
             </a:r>
             <a:endParaRPr lang="en-US" sz="3200" dirty="0"/>
           </a:p>
@@ -1794,7 +1794,7 @@
                 <a:ea typeface="Calibri" pitchFamily="34" charset="-122"/>
                 <a:cs typeface="Calibri" pitchFamily="34" charset="-120"/>
               </a:rPr>
-              <a:t>Демонстрационные данные</a:t>
+              <a:t>Реальный интерфейс · тестовые данные</a:t>
             </a:r>
             <a:endParaRPr lang="en-US" sz="1100" dirty="0"/>
           </a:p>
@@ -1865,7 +1865,7 @@
                 <a:ea typeface="Calibri" pitchFamily="34" charset="-122"/>
                 <a:cs typeface="Calibri" pitchFamily="34" charset="-120"/>
               </a:rPr>
-              <a:t>Заполнять можно с телефона</a:t>
+              <a:t>Урок 3. То же самое — с телефона</a:t>
             </a:r>
             <a:endParaRPr lang="en-US" sz="3200" dirty="0"/>
           </a:p>
@@ -2045,7 +2045,7 @@
                 <a:ea typeface="Calibri" pitchFamily="34" charset="-122"/>
                 <a:cs typeface="Calibri" pitchFamily="34" charset="-120"/>
               </a:rPr>
-              <a:t>Демонстрационные данные</a:t>
+              <a:t>Реальный интерфейс · тестовые данные</a:t>
             </a:r>
             <a:endParaRPr lang="en-US" sz="1100" dirty="0"/>
           </a:p>
